--- a/UK-AI-Agent-EP5/submissions/team-one/docs/GOVhence MEM-0 Presentation v2.pptx
+++ b/UK-AI-Agent-EP5/submissions/team-one/docs/GOVhence MEM-0 Presentation v2.pptx
@@ -499,6 +499,99 @@
           </a:prstGeom>
         </p:spPr>
       </p:pic>
+      <p:sp>
+        <p:nvSpPr>
+          <p:cNvPr id="3" name="TextBox 2">
+            <a:extLst>
+              <a:ext uri="{FF2B5EF4-FFF2-40B4-BE49-F238E27FC236}">
+                <a16:creationId xmlns:a16="http://schemas.microsoft.com/office/drawing/2014/main" id="{A1BAE305-5993-46AE-BD5D-3772E319FA8C}"/>
+              </a:ext>
+            </a:extLst>
+          </p:cNvPr>
+          <p:cNvSpPr txBox="1"/>
+          <p:nvPr/>
+        </p:nvSpPr>
+        <p:spPr>
+          <a:xfrm>
+            <a:off x="9090561" y="1122218"/>
+            <a:ext cx="2725387" cy="830997"/>
+          </a:xfrm>
+          <a:prstGeom prst="rect">
+            <a:avLst/>
+          </a:prstGeom>
+          <a:noFill/>
+        </p:spPr>
+        <p:txBody>
+          <a:bodyPr wrap="square" rtlCol="0">
+            <a:spAutoFit/>
+          </a:bodyPr>
+          <a:lstStyle/>
+          <a:p>
+            <a:r>
+              <a:rPr lang="en-US" sz="2400" dirty="0">
+                <a:solidFill>
+                  <a:schemeClr val="accent5">
+                    <a:lumMod val="60000"/>
+                    <a:lumOff val="40000"/>
+                  </a:schemeClr>
+                </a:solidFill>
+              </a:rPr>
+              <a:t>Benjamin </a:t>
+            </a:r>
+            <a:r>
+              <a:rPr lang="en-US" sz="2400" dirty="0" err="1">
+                <a:solidFill>
+                  <a:schemeClr val="accent5">
+                    <a:lumMod val="60000"/>
+                    <a:lumOff val="40000"/>
+                  </a:schemeClr>
+                </a:solidFill>
+              </a:rPr>
+              <a:t>Dacquay</a:t>
+            </a:r>
+            <a:br>
+              <a:rPr lang="en-US" sz="2400" dirty="0">
+                <a:solidFill>
+                  <a:schemeClr val="accent5">
+                    <a:lumMod val="60000"/>
+                    <a:lumOff val="40000"/>
+                  </a:schemeClr>
+                </a:solidFill>
+              </a:rPr>
+            </a:br>
+            <a:r>
+              <a:rPr lang="en-US" sz="2400" dirty="0">
+                <a:solidFill>
+                  <a:schemeClr val="accent5">
+                    <a:lumMod val="60000"/>
+                    <a:lumOff val="40000"/>
+                  </a:schemeClr>
+                </a:solidFill>
+              </a:rPr>
+              <a:t>Alexis </a:t>
+            </a:r>
+            <a:r>
+              <a:rPr lang="en-US" sz="2400" dirty="0" err="1">
+                <a:solidFill>
+                  <a:schemeClr val="accent5">
+                    <a:lumMod val="60000"/>
+                    <a:lumOff val="40000"/>
+                  </a:schemeClr>
+                </a:solidFill>
+              </a:rPr>
+              <a:t>Dacquay</a:t>
+            </a:r>
+            <a:endParaRPr lang="en-US" sz="2400" dirty="0">
+              <a:solidFill>
+                <a:schemeClr val="accent5">
+                  <a:lumMod val="60000"/>
+                  <a:lumOff val="40000"/>
+                </a:schemeClr>
+              </a:solidFill>
+            </a:endParaRPr>
+          </a:p>
+        </p:txBody>
+      </p:sp>
     </p:spTree>
   </p:cSld>
   <p:clrMapOvr>
@@ -787,7 +880,7 @@
         </p:blipFill>
         <p:spPr>
           <a:xfrm>
-            <a:off x="220542" y="3188524"/>
+            <a:off x="285856" y="1144756"/>
             <a:ext cx="11750915" cy="2621923"/>
           </a:xfrm>
           <a:prstGeom prst="rect">
@@ -795,6 +888,161 @@
           </a:prstGeom>
         </p:spPr>
       </p:pic>
+      <p:sp>
+        <p:nvSpPr>
+          <p:cNvPr id="3" name="TextBox 2">
+            <a:extLst>
+              <a:ext uri="{FF2B5EF4-FFF2-40B4-BE49-F238E27FC236}">
+                <a16:creationId xmlns:a16="http://schemas.microsoft.com/office/drawing/2014/main" id="{744DD277-7CB3-4D75-BA99-97F2869C5BA1}"/>
+              </a:ext>
+            </a:extLst>
+          </p:cNvPr>
+          <p:cNvSpPr txBox="1"/>
+          <p:nvPr/>
+        </p:nvSpPr>
+        <p:spPr>
+          <a:xfrm>
+            <a:off x="380010" y="492826"/>
+            <a:ext cx="4233554" cy="369332"/>
+          </a:xfrm>
+          <a:prstGeom prst="rect">
+            <a:avLst/>
+          </a:prstGeom>
+          <a:noFill/>
+        </p:spPr>
+        <p:txBody>
+          <a:bodyPr wrap="square" rtlCol="0">
+            <a:spAutoFit/>
+          </a:bodyPr>
+          <a:lstStyle/>
+          <a:p>
+            <a:r>
+              <a:rPr lang="en-US" dirty="0">
+                <a:solidFill>
+                  <a:schemeClr val="accent5">
+                    <a:lumMod val="20000"/>
+                    <a:lumOff val="80000"/>
+                  </a:schemeClr>
+                </a:solidFill>
+              </a:rPr>
+              <a:t>Revoke Lineage</a:t>
+            </a:r>
+          </a:p>
+        </p:txBody>
+      </p:sp>
+      <p:sp>
+        <p:nvSpPr>
+          <p:cNvPr id="4" name="TextBox 3">
+            <a:extLst>
+              <a:ext uri="{FF2B5EF4-FFF2-40B4-BE49-F238E27FC236}">
+                <a16:creationId xmlns:a16="http://schemas.microsoft.com/office/drawing/2014/main" id="{2DC9A02E-C729-4E30-972A-A47CC8E78806}"/>
+              </a:ext>
+            </a:extLst>
+          </p:cNvPr>
+          <p:cNvSpPr txBox="1"/>
+          <p:nvPr/>
+        </p:nvSpPr>
+        <p:spPr>
+          <a:xfrm>
+            <a:off x="890649" y="4346369"/>
+            <a:ext cx="5254832" cy="1754326"/>
+          </a:xfrm>
+          <a:prstGeom prst="rect">
+            <a:avLst/>
+          </a:prstGeom>
+          <a:noFill/>
+        </p:spPr>
+        <p:txBody>
+          <a:bodyPr wrap="square" rtlCol="0">
+            <a:spAutoFit/>
+          </a:bodyPr>
+          <a:lstStyle/>
+          <a:p>
+            <a:pPr algn="l"/>
+            <a:endParaRPr lang="en-US" sz="1400" b="0" i="0" dirty="0">
+              <a:solidFill>
+                <a:srgbClr val="BFBFBF"/>
+              </a:solidFill>
+              <a:effectLst/>
+              <a:latin typeface="-apple-system"/>
+            </a:endParaRPr>
+          </a:p>
+          <a:p>
+            <a:pPr algn="l">
+              <a:buFont typeface="Arial" panose="020B0604020202020204" pitchFamily="34" charset="0"/>
+              <a:buChar char="•"/>
+            </a:pPr>
+            <a:r>
+              <a:rPr lang="en-US" sz="2000" b="0" i="0" dirty="0">
+                <a:solidFill>
+                  <a:srgbClr val="BFBFBF"/>
+                </a:solidFill>
+                <a:effectLst/>
+                <a:latin typeface="-apple-system"/>
+              </a:rPr>
+              <a:t>Revoke a source → all derivatives revoked</a:t>
+            </a:r>
+          </a:p>
+          <a:p>
+            <a:pPr algn="l">
+              <a:buFont typeface="Arial" panose="020B0604020202020204" pitchFamily="34" charset="0"/>
+              <a:buChar char="•"/>
+            </a:pPr>
+            <a:r>
+              <a:rPr lang="en-US" sz="2000" b="0" i="0" dirty="0">
+                <a:solidFill>
+                  <a:srgbClr val="BFBFBF"/>
+                </a:solidFill>
+                <a:effectLst/>
+                <a:latin typeface="-apple-system"/>
+              </a:rPr>
+              <a:t>Overrides clearance</a:t>
+            </a:r>
+          </a:p>
+          <a:p>
+            <a:pPr algn="l">
+              <a:buFont typeface="Arial" panose="020B0604020202020204" pitchFamily="34" charset="0"/>
+              <a:buChar char="•"/>
+            </a:pPr>
+            <a:r>
+              <a:rPr lang="en-US" sz="2000" b="0" i="0" dirty="0">
+                <a:solidFill>
+                  <a:srgbClr val="BFBFBF"/>
+                </a:solidFill>
+                <a:effectLst/>
+                <a:latin typeface="-apple-system"/>
+              </a:rPr>
+              <a:t>Deterministic, fail-closed</a:t>
+            </a:r>
+          </a:p>
+          <a:p>
+            <a:pPr algn="l">
+              <a:buFont typeface="Arial" panose="020B0604020202020204" pitchFamily="34" charset="0"/>
+              <a:buChar char="•"/>
+            </a:pPr>
+            <a:r>
+              <a:rPr lang="en-US" sz="2000" b="0" i="0" dirty="0">
+                <a:solidFill>
+                  <a:srgbClr val="BFBFBF"/>
+                </a:solidFill>
+                <a:effectLst/>
+                <a:latin typeface="-apple-system"/>
+              </a:rPr>
+              <a:t>Every decision logged</a:t>
+            </a:r>
+          </a:p>
+          <a:p>
+            <a:endParaRPr lang="en-US" sz="1400" dirty="0">
+              <a:solidFill>
+                <a:schemeClr val="accent5">
+                  <a:lumMod val="20000"/>
+                  <a:lumOff val="80000"/>
+                </a:schemeClr>
+              </a:solidFill>
+            </a:endParaRPr>
+          </a:p>
+        </p:txBody>
+      </p:sp>
     </p:spTree>
     <p:extLst>
       <p:ext uri="{BB962C8B-B14F-4D97-AF65-F5344CB8AC3E}">
